--- a/decks/geog-weather-hazards/geog-weather-hazards_ch5_uk-weather.pptx
+++ b/decks/geog-weather-hazards/geog-weather-hazards_ch5_uk-weather.pptx
@@ -126,30 +126,30 @@
   <p:extLst>
     <p:ext uri="{521415D9-36F7-43E2-AB2F-B90AF26B5E84}">
       <p14:sectionLst xmlns:p14="http://schemas.microsoft.com/office/powerpoint/2010/main">
-        <p14:section name="Opening" id="{507016bb-5121-4d94-420e-599bf005351b}">
+        <p14:section name="Opening" id="{b25ba181-09ed-974c-f3c5-d7723563589a}">
           <p14:sldIdLst>
             <p14:sldId id="256"/>
           </p14:sldIdLst>
         </p14:section>
-        <p14:section name="Gate" id="{2965df8f-ac36-60cc-181e-66836eecdf92}">
+        <p14:section name="Gate" id="{a02b5f06-b6af-285c-5303-fb65943425b2}">
           <p14:sldIdLst>
             <p14:sldId id="257"/>
             <p14:sldId id="258"/>
           </p14:sldIdLst>
         </p14:section>
-        <p14:section name="Pre-teach" id="{328b133d-16fd-2117-8230-c8a853d0aaa2}">
+        <p14:section name="Pre-teach" id="{075b2c73-3b32-31bb-0198-370761b6cc5f}">
           <p14:sldIdLst>
             <p14:sldId id="259"/>
             <p14:sldId id="260"/>
           </p14:sldIdLst>
         </p14:section>
-        <p14:section name="Read-along" id="{ba16c290-f84b-f93e-beaa-ac0f9c24d78c}">
+        <p14:section name="Read-along" id="{955d15f1-3f84-69f6-4820-518c1d912454}">
           <p14:sldIdLst>
             <p14:sldId id="261"/>
             <p14:sldId id="262"/>
           </p14:sldIdLst>
         </p14:section>
-        <p14:section name="Teach" id="{7c8a9cbe-fd89-ea3e-4691-75247449b295}">
+        <p14:section name="Teach" id="{5d6c14a1-1c5e-f35c-d898-30a0c3b62b42}">
           <p14:sldIdLst>
             <p14:sldId id="263"/>
             <p14:sldId id="264"/>
@@ -158,7 +158,7 @@
             <p14:sldId id="267"/>
           </p14:sldIdLst>
         </p14:section>
-        <p14:section name="Routes" id="{42228081-0c02-b11c-6f10-3a9945888f7b}">
+        <p14:section name="Routes" id="{1c06f6f2-61c2-083a-ea6e-e5ca5e5b8987}">
           <p14:sldIdLst>
             <p14:sldId id="268"/>
             <p14:sldId id="269"/>
@@ -166,12 +166,12 @@
             <p14:sldId id="271"/>
           </p14:sldIdLst>
         </p14:section>
-        <p14:section name="Close" id="{08426a54-ea2e-1681-ab89-f40637a7401e}">
+        <p14:section name="Close" id="{93a69b35-f997-3972-14ce-692d8edb8ce6}">
           <p14:sldIdLst>
             <p14:sldId id="272"/>
           </p14:sldIdLst>
         </p14:section>
-        <p14:section name="Answers" id="{b70765ab-9cd7-bacf-3a0d-99b9b61f4b63}">
+        <p14:section name="Answers" id="{2c79e4a5-e313-0fd9-3b4b-9d68fb78945a}">
           <p14:sldIdLst>
             <p14:sldId id="273"/>
             <p14:sldId id="274"/>
@@ -675,7 +675,7 @@
               <a:rPr lang="en-US" dirty="0"/>
               <a:t>Teach — Is the UK's weather becoming more extreme?. Say it in your own words, then check understanding with a quick question: ask a pupil from the pre-teach group first, since they met these words and ideas before the lesson. Pupils try to recall before you re-explain.
 A weather event is extreme when it is well outside what is normal for the place and the time of year, and when it can cause serious harm to people or the economy. Thunderstorms, prolonged rainfall, drought, extreme heat, heavy snow and extreme cold can all be extreme weather. The deck's examples: the 2003 heatwave, when temperatures in Kent reached 38.5 °C and 2000 deaths in the UK were linked to the heat; the summer of 2007, the wettest on record, when 414 mm of rain fell between June and August; and the Beast from the East in March 2018, when extreme cold and blizzards cost businesses about £300 million over four days. Your timeline of UK extreme weather runs: heatwave 2003, floods 2007, floods 2008, floods and heavy snow 2009, heavy snow 2010, floods 2013 to 2014 and floods 2015 to 2016.
-In class you sorted statements into evidence for and against the UK's weather becoming more extreme. For: UK temperatures seem to follow the global warming pattern, and the top ten hottest years on record have all occurred in the last 20 years; there have been many extreme events in the past two decades, including heatwaves, droughts and major flooding; parts of Cumbria around Carlisle have been hit repeatedly in the last decade by floods that should statistically happen only once every 100 years; and rainfall records for 2004 to 2007 show several months with more than 150 per cent of the national average.
+In class you sorted statements into evidence for and against the UK's weather becoming more extreme. For: UK temperatures seem to follow the global warming pattern, and all ten of the hottest years on record fall inside the last 20 years; the past two decades have brought one extreme event after another, among them heatwaves, droughts and serious flooding; around Carlisle in Cumbria the last decade has brought flood after flood that should statistically happen only once every 100 years; and rainfall records for 2004 to 2007 show several months with more than 150 per cent of the national average.
 Against: some kinds of extreme weather are rarer than 30 years ago, since heavy snowfall and cold winters have declined and the River Thames, which iced over every year in the nineteenth century, no longer does; weather is naturally highly variable and extreme events have always happened, but they are far more publicised in the media now, so awareness is growing; the statement about El Niño doubling the chance of extreme weather is about America and Asia, not the UK; and the Met Office inviting the public to name storms tells us about publicity, not about the weather itself. A good answer uses two pieces of evidence on each side and reaches its own conclusion.
 Worked example — model it step by step, thinking aloud: In the summer of 2007, 414 mm of rain fell between June and August. What was the average rainfall per month? (1) June, July and August are three months. (2) 414 ÷ 3 = 138 mm per month. (3) Check the sense: the UK's typical summer month has well under 100 mm in many places, so 138 mm every month explains why 2007 was the wettest summer on record. Answer: 138 mm per month.
 Tip: Evidence needs a number and a date. The wettest summer on record is a claim; 414 mm between June and August 2007 is evidence.</a:t>
@@ -768,7 +768,7 @@
               <a:rPr lang="en-US" dirty="0"/>
               <a:t>Teach — Is the UK's weather becoming more extreme?. Say it in your own words, then check understanding with a quick question: ask a pupil from the pre-teach group first, since they met these words and ideas before the lesson. Pupils try to recall before you re-explain.
 A weather event is extreme when it is well outside what is normal for the place and the time of year, and when it can cause serious harm to people or the economy. Thunderstorms, prolonged rainfall, drought, extreme heat, heavy snow and extreme cold can all be extreme weather. The deck's examples: the 2003 heatwave, when temperatures in Kent reached 38.5 °C and 2000 deaths in the UK were linked to the heat; the summer of 2007, the wettest on record, when 414 mm of rain fell between June and August; and the Beast from the East in March 2018, when extreme cold and blizzards cost businesses about £300 million over four days. Your timeline of UK extreme weather runs: heatwave 2003, floods 2007, floods 2008, floods and heavy snow 2009, heavy snow 2010, floods 2013 to 2014 and floods 2015 to 2016.
-In class you sorted statements into evidence for and against the UK's weather becoming more extreme. For: UK temperatures seem to follow the global warming pattern, and the top ten hottest years on record have all occurred in the last 20 years; there have been many extreme events in the past two decades, including heatwaves, droughts and major flooding; parts of Cumbria around Carlisle have been hit repeatedly in the last decade by floods that should statistically happen only once every 100 years; and rainfall records for 2004 to 2007 show several months with more than 150 per cent of the national average.
+In class you sorted statements into evidence for and against the UK's weather becoming more extreme. For: UK temperatures seem to follow the global warming pattern, and all ten of the hottest years on record fall inside the last 20 years; the past two decades have brought one extreme event after another, among them heatwaves, droughts and serious flooding; around Carlisle in Cumbria the last decade has brought flood after flood that should statistically happen only once every 100 years; and rainfall records for 2004 to 2007 show several months with more than 150 per cent of the national average.
 Against: some kinds of extreme weather are rarer than 30 years ago, since heavy snowfall and cold winters have declined and the River Thames, which iced over every year in the nineteenth century, no longer does; weather is naturally highly variable and extreme events have always happened, but they are far more publicised in the media now, so awareness is growing; the statement about El Niño doubling the chance of extreme weather is about America and Asia, not the UK; and the Met Office inviting the public to name storms tells us about publicity, not about the weather itself. A good answer uses two pieces of evidence on each side and reaches its own conclusion.
 Worked example — model it step by step, thinking aloud: In the summer of 2007, 414 mm of rain fell between June and August. What was the average rainfall per month? (1) June, July and August are three months. (2) 414 ÷ 3 = 138 mm per month. (3) Check the sense: the UK's typical summer month has well under 100 mm in many places, so 138 mm every month explains why 2007 was the wettest summer on record. Answer: 138 mm per month.
 Tip: Evidence needs a number and a date. The wettest summer on record is a claim; 414 mm between June and August 2007 is evidence.</a:t>
@@ -860,7 +860,7 @@
             <a:r>
               <a:rPr lang="en-US" dirty="0"/>
               <a:t>Teach — Climate change, extreme weather and the June 2017 heat wave. Say it in your own words, then check understanding with a quick question: ask a pupil from the pre-teach group first, since they met these words and ideas before the lesson. Pupils try to recall before you re-explain.
-Extreme weather is not only a UK story. There have been devastating floods in Pakistan (2010), intense heatwaves in Russia (2010) and severe droughts in the western USA (2014). No single extreme weather event can be blamed on climate change, but scientists believe that a trend over many years could be linked to a warming world. More energy in the atmosphere could lead to more intense storms, and atmospheric circulation may change, bringing floods to normally dry regions and heatwaves to normally cooler ones. In 2011 the Intergovernmental Panel on Climate Change (IPCC) concluded that extreme weather would become more common as global warming heats the planet.
+Extreme weather is not only a UK story. Pakistan was devastated by floods in 2010, Russia endured fierce heatwaves the same year, and the western USA suffered severe drought in 2014. No one event can be pinned on climate change by itself, but a trend running over many years can be, and that is what scientists think they are watching: a warmer world holds more energy, which can drive fiercer storms, and the great loops of circulating air may shift, so rain falls where it used to be dry and heat builds where it used to be mild. The Intergovernmental Panel on Climate Change (IPCC) reached that conclusion in 2011, judging that extreme weather would grow more common as the planet warms.
 One suggested mechanism links back to chapter 1. German scientists have suggested that weather patterns have in recent years stayed in place for long periods, giving prolonged heatwaves and droughts or prolonged heavy rain and floods. The Arctic is currently warming at twice the global average rate. As the Hadley and Ferrel cells expand towards the poles, the atmospheric circulation in the northern hemisphere's middle latitudes, where the UK sits, may slow down, so that weather lingers instead of moving on. This could help to explain recent UK heatwaves and floods. A four-mark suggest answer gives this chain: climate change, a warming Arctic, slower circulation, weather lingering, more extreme events.
 Your extreme weather case study is the UK heat wave of June 2017, which you researched independently. The deck gives you the frame, not the facts: the location and dates of the heat wave and the places that recorded the highest temperatures; the causes, including the air masses involved; the social impacts on people such as health problems; the economic impacts such as businesses closing and transport disruption; the environmental impacts such as wildfires, thunderstorms and flash flooding, drought and damage to farming; and the management strategies used to reduce the risk. Fill the frame from your own research notes and keep the six headings in that order.
 Tip: Causes of a UK extreme weather event always involve where the air came from: name the direction and the air mass.</a:t>
@@ -1512,7 +1512,7 @@
             <a:r>
               <a:rPr lang="en-US" dirty="0"/>
               <a:t>Answers — task 2: Evidence for or against?. Reveal the answer; pupils mark their own work in a different colour, then read the "why" together. Same destination for every lane, so one answer serves the whole class.
-Answer: B   Heavy snowfall and cold winters have declined over the last 30 years, and the Thames no longer freezes
+Answer: C   Heavy snowfall and cold winters have declined over the last 30 years, and the Thames no longer freezes
 Why: Declining snow and cold winters, with the Thames no longer freezing, show one kind of extreme weather becoming rarer, so the class sorted it as evidence against. The other three statements describe records and repeats, which are evidence for.
 Ask a Support pupil to explain one step, and a Stretch pupil to share their extension.</a:t>
             </a:r>
@@ -2258,7 +2258,7 @@
             <a:r>
               <a:rPr lang="en-US" dirty="0"/>
               <a:t>Teach — Weather, climate and the UK's roundabout. Say it in your own words, then check understanding with a quick question: ask a pupil from the pre-teach group first, since they met these words and ideas before the lesson. Pupils try to recall before you re-explain.
-Weather is a description of the day-to-day conditions of the atmosphere: today's temperature, rain, wind and cloud. Climate is the average weather over a long period of time, usually 30 years. Weather hazards are extreme weather events, and even though the UK has a moderate climate, it experiences extreme weather. Most of the UK's weather is driven towards it by south-westerly prevailing winds, fuelled by the warm, moist Atlantic Ocean, so strong winds and heavy rain batter the exposed western side of the country most often.
+Weather is a description of the day-to-day conditions of the atmosphere: today's temperature, rain, wind and cloud. Climate is what the weather is usually like over a long stretch of time, normally taken as 30 years. A weather hazard is an extreme weather event that can do harm, and even though the UK has a moderate climate, it experiences extreme weather. Most of the UK's weather is driven towards it by south-westerly prevailing winds, fuelled by the warm, moist Atlantic Ocean, so strong winds and heavy rain batter the exposed western side of the country most often.
 The deck pictures the UK as a weather roundabout, because it sits at the meeting point of several kinds of weather from different directions. From the north, Arctic air brings heavy snow and bitterly cold conditions. From the east, continental air brings severe winter weather. From the south, hot and sunny weather can lead to heatwaves and droughts. From the west, storms from the Atlantic bring heavy rain and strong winds. Which weather the UK gets depends on which direction the air is coming from.
 Depressions are the key word for the west. A depression is an area of low atmospheric pressure, and depressions cross the UK regularly, bringing heavy rain that can trigger river floods and winds that can cause great storm damage, especially on the west coast. When depressions are not passing over as usual, cold conditions from the north or east take over instead.
 Tip: Give the four directions and a hazard for each: north, snow; east, severe winter; south, heatwave and drought; west, Atlantic storms.</a:t>
@@ -2351,7 +2351,7 @@
               <a:rPr lang="en-US" dirty="0"/>
               <a:t>Teach — The UK's weather hazards. Say it in your own words, then check understanding with a quick question: ask a pupil from the pre-teach group first, since they met these words and ideas before the lesson. Pupils try to recall before you re-explain.
 Storms. A cluster of strong depressions caused widespread wind damage in late 2013. During the St Jude storm of 28 October 2013, winds of 160 km/h killed 5 people, felled trees and toppled lorries; further storms in the week before Christmas brought more deaths and disruption, with thousands losing power and travellers stranded at Gatwick airport. The UK also gets tornadoes: in 2005 a tornado in Birmingham caused 19 injuries and damage costing £40 million.
-Cold. The winters of 1946 to 1947, 1962 to 1963 and 1978 to 1979 were exceptionally cold, and 2010 to 2011 and 2014 to 2015 were also unusually cold. Frost of around −10 °C can kill crops and cattle; freezing conditions cancelled over 17 000 trains in January 2014; blizzards bring transport to a halt and cause costly airline delays. Prolonged rainfall. Rain over a long period leads to river floods, especially in late winter and early spring when melting snow adds to the problem; in the very wet winter of 2014, flooding was widespread across much of the south of England.
+Cold. The winters of 1946 to 1947, 1962 to 1963 and 1978 to 1979 were exceptionally cold, and 2010 to 2011 and 2014 to 2015 were also unusually cold. Frost of around −10 °C can kill crops and cattle; freezing conditions cancelled over 17 000 trains in January 2014; blizzards bring transport to a halt and cause costly airline delays. Prolonged rainfall. Rain over a long period leads to river floods, especially in late winter and early spring when melting snow adds to the problem; the winter of 2014 was so wet that floods spread across a great deal of southern England.
 Heatwaves and drought. A drought is an extended period of low or absent rainfall compared with the expected average for the region. The 2003 drought and heatwave affected large parts of Europe, where it was linked to 20 000 deaths, and brought what was then the UK's highest recorded temperature, 38.5 °C at Faversham in Kent. The same deck slide puts 2000 deaths in the UK down to the 2003 heat. Each hazard also triggers secondary hazards: a storm can cause floods and power cuts, a drought can cause crop failure and wildfires.
 Tip: For a four-mark outline the evidence question, give two hazards and one piece of evidence for each, with a date and a number. A list without evidence earns at most two marks.</a:t>
             </a:r>
@@ -5707,7 +5707,7 @@
                 <a:ea typeface="Calibri" pitchFamily="34" charset="-122"/>
                 <a:cs typeface="Calibri" pitchFamily="34" charset="-120"/>
               </a:rPr>
-              <a:t>Extreme weather is not only a UK story. There have been devastating floods in Pakistan (2010), intense heatwaves in Russia (2010) and severe droughts in the western USA (2014).</a:t>
+              <a:t>Extreme weather is not only a UK story. Pakistan was devastated by floods in 2010, Russia endured fierce heatwaves the same year, and the western USA suffered severe drought in 2014.</a:t>
             </a:r>
             <a:endParaRPr lang="en-US" sz="2200" dirty="0"/>
           </a:p>
@@ -8564,7 +8564,7 @@
                 <a:ea typeface="Calibri" pitchFamily="34" charset="-122"/>
                 <a:cs typeface="Calibri" pitchFamily="34" charset="-120"/>
               </a:rPr>
-              <a:t>The top ten hottest years on record have all occurred in the last 20 years</a:t>
+              <a:t>All ten of the hottest years on record fall inside the last 20 years</a:t>
             </a:r>
             <a:endParaRPr lang="en-US" sz="2600" dirty="0"/>
           </a:p>
@@ -8601,7 +8601,7 @@
                 <a:ea typeface="Calibri" pitchFamily="34" charset="-122"/>
                 <a:cs typeface="Calibri" pitchFamily="34" charset="-120"/>
               </a:rPr>
-              <a:t>Heavy snowfall and cold winters have declined over the last 30 years, and the Thames no longer freezes</a:t>
+              <a:t>Rainfall records for 2004 to 2007 show several months above 150 per cent of the national average</a:t>
             </a:r>
             <a:endParaRPr lang="en-US" sz="2600" dirty="0"/>
           </a:p>
@@ -8638,7 +8638,7 @@
                 <a:ea typeface="Calibri" pitchFamily="34" charset="-122"/>
                 <a:cs typeface="Calibri" pitchFamily="34" charset="-120"/>
               </a:rPr>
-              <a:t>Parts of Cumbria around Carlisle have been hit repeatedly by floods that should happen once every 100 years</a:t>
+              <a:t>Heavy snowfall and cold winters have declined over the last 30 years, and the Thames no longer freezes</a:t>
             </a:r>
             <a:endParaRPr lang="en-US" sz="2600" dirty="0"/>
           </a:p>
@@ -8675,7 +8675,7 @@
                 <a:ea typeface="Calibri" pitchFamily="34" charset="-122"/>
                 <a:cs typeface="Calibri" pitchFamily="34" charset="-120"/>
               </a:rPr>
-              <a:t>Rainfall records for 2004 to 2007 show several months above 150 per cent of the national average</a:t>
+              <a:t>Parts of Cumbria around Carlisle have been hit repeatedly by floods that should happen once every 100 years</a:t>
             </a:r>
             <a:endParaRPr lang="en-US" sz="2600" dirty="0"/>
           </a:p>
@@ -11162,7 +11162,7 @@
                 <a:ea typeface="Cambria" pitchFamily="34" charset="-122"/>
                 <a:cs typeface="Cambria" pitchFamily="34" charset="-120"/>
               </a:rPr>
-              <a:t>B   Heavy snowfall and cold winters have declined over the last 30 years, and the Thames no longer freezes</a:t>
+              <a:t>C   Heavy snowfall and cold winters have declined over the last 30 years, and the Thames no longer freezes</a:t>
             </a:r>
             <a:endParaRPr lang="en-US" sz="1800" dirty="0"/>
           </a:p>
